--- a/assets/pptx/catalog-186.pptx
+++ b/assets/pptx/catalog-186.pptx
@@ -3392,7 +3392,7 @@
                 <a:ea typeface="Ebrima"/>
                 <a:cs typeface="Ebrima"/>
               </a:rPr>
-              <a:t>አታስጨንቂኝ ተይኝ (3x)</a:t>
+              <a:t>አታስጨንቂኝ ተይኝ 3x</a:t>
             </a:r>
           </a:p>
         </p:txBody>
@@ -3580,7 +3580,7 @@
                 <a:ea typeface="Ebrima"/>
                 <a:cs typeface="Ebrima"/>
               </a:rPr>
-              <a:t>ተይ ነፍሴ ተይ ተይኝ (በምህረቱ : ቸርነቱ : የሚከልልሽ)</a:t>
+              <a:t>ተይ ነፍሴ ተይ ተይኝ በምህረቱ : ቸርነቱ : የሚከልልሽ</a:t>
             </a:r>
           </a:p>
           <a:p>
@@ -3616,7 +3616,7 @@
                 <a:ea typeface="Ebrima"/>
                 <a:cs typeface="Ebrima"/>
               </a:rPr>
-              <a:t>አታስጨንቂኝ ተይኝ (እንደ ንስር የሚያድስ ቃል ዋስ አለብሽ)</a:t>
+              <a:t>አታስጨንቂኝ ተይኝ እንደ ንስር የሚያድስ ቃል ዋስ አለብሽ</a:t>
             </a:r>
           </a:p>
           <a:p>
@@ -3652,7 +3652,7 @@
                 <a:ea typeface="Ebrima"/>
                 <a:cs typeface="Ebrima"/>
               </a:rPr>
-              <a:t>አታስጨንቂኝ ተይኝ (ኧረ እግዚአብሔር ነዉ)</a:t>
+              <a:t>አታስጨንቂኝ ተይኝ ኧረ እግዚአብሔር ነዉ</a:t>
             </a:r>
           </a:p>
           <a:p>
@@ -3670,7 +3670,7 @@
                 <a:ea typeface="Ebrima"/>
                 <a:cs typeface="Ebrima"/>
               </a:rPr>
-              <a:t>አታስጨንቂኝ ተይኝ (ታመኝዉ ታመኝዉ)</a:t>
+              <a:t>አታስጨንቂኝ ተይኝ ታመኝዉ ታመኝዉ</a:t>
             </a:r>
           </a:p>
         </p:txBody>
@@ -3737,7 +3737,7 @@
                 <a:ea typeface="Ebrima"/>
                 <a:cs typeface="Ebrima"/>
               </a:rPr>
-              <a:t>ተይ (ታመኝዉ) ነፍሴ ተይ ተይኝ</a:t>
+              <a:t>ተይ ታመኝዉ ነፍሴ ተይ ተይኝ</a:t>
             </a:r>
           </a:p>
           <a:p>
@@ -3773,7 +3773,7 @@
                 <a:ea typeface="Ebrima"/>
                 <a:cs typeface="Ebrima"/>
               </a:rPr>
-              <a:t>ተይ (ታመኝዉ) ነፍሴ ተይ ተይኝ</a:t>
+              <a:t>ተይ ታመኝዉ ነፍሴ ተይ ተይኝ</a:t>
             </a:r>
           </a:p>
           <a:p>
@@ -3858,7 +3858,7 @@
                 <a:ea typeface="Ebrima"/>
                 <a:cs typeface="Ebrima"/>
               </a:rPr>
-              <a:t>የሚረባኝን የሚያውቅልኝ (2x)</a:t>
+              <a:t>የሚረባኝን የሚያውቅልኝ 2x</a:t>
             </a:r>
           </a:p>
           <a:p>
@@ -4118,7 +4118,7 @@
                 <a:ea typeface="Ebrima"/>
                 <a:cs typeface="Ebrima"/>
               </a:rPr>
-              <a:t>አሁንማ ከአንተ ጋር ልስማማ (2x)</a:t>
+              <a:t>አሁንማ ከአንተ ጋር ልስማማ 2x</a:t>
             </a:r>
           </a:p>
           <a:p>
@@ -4136,7 +4136,7 @@
                 <a:ea typeface="Ebrima"/>
                 <a:cs typeface="Ebrima"/>
               </a:rPr>
-              <a:t>እንግዲማ ከአንተ ጋር ልስማማ (2x)</a:t>
+              <a:t>እንግዲማ ከአንተ ጋር ልስማማ 2x</a:t>
             </a:r>
           </a:p>
         </p:txBody>
@@ -4257,7 +4257,7 @@
                 <a:ea typeface="Ebrima"/>
                 <a:cs typeface="Ebrima"/>
               </a:rPr>
-              <a:t>የእግዚአብሔር ፍቅር ከሰው የላቅ (2x)</a:t>
+              <a:t>የእግዚአብሔር ፍቅር ከሰው የላቅ 2x</a:t>
             </a:r>
           </a:p>
         </p:txBody>
@@ -4324,7 +4324,7 @@
                 <a:ea typeface="Ebrima"/>
                 <a:cs typeface="Ebrima"/>
               </a:rPr>
-              <a:t>አሁንማ ከአንተ ጋር ልስማማ (2x)</a:t>
+              <a:t>አሁንማ ከአንተ ጋር ልስማማ 2x</a:t>
             </a:r>
           </a:p>
           <a:p>
@@ -4342,7 +4342,7 @@
                 <a:ea typeface="Ebrima"/>
                 <a:cs typeface="Ebrima"/>
               </a:rPr>
-              <a:t>እንግዲማ ከአንተ ጋር ልስማማ (2x)</a:t>
+              <a:t>እንግዲማ ከአንተ ጋር ልስማማ 2x</a:t>
             </a:r>
           </a:p>
         </p:txBody>
@@ -4409,7 +4409,7 @@
                 <a:ea typeface="Ebrima"/>
                 <a:cs typeface="Ebrima"/>
               </a:rPr>
-              <a:t>አፈርኩበት : እኔ አውቃለው ባልኩበት (2x)</a:t>
+              <a:t>አፈርኩበት : እኔ አውቃለው ባልኩበት 2x</a:t>
             </a:r>
           </a:p>
           <a:p>
@@ -4651,7 +4651,7 @@
                 <a:ea typeface="Ebrima"/>
                 <a:cs typeface="Ebrima"/>
               </a:rPr>
-              <a:t>እግዚአብሔር ያለው ይሁንልኝ ይሁንልኝ (2x)</a:t>
+              <a:t>እግዚአብሔር ያለው ይሁንልኝ ይሁንልኝ 2x</a:t>
             </a:r>
           </a:p>
         </p:txBody>
